--- a/Reporte 220526.pptx
+++ b/Reporte 220526.pptx
@@ -21,8 +21,8 @@
     <p:sldId id="369" r:id="rId12"/>
     <p:sldId id="361" r:id="rId13"/>
     <p:sldId id="371" r:id="rId14"/>
-    <p:sldId id="384" r:id="rId15"/>
-    <p:sldId id="397" r:id="rId16"/>
+    <p:sldId id="398" r:id="rId15"/>
+    <p:sldId id="384" r:id="rId16"/>
     <p:sldId id="280" r:id="rId17"/>
   </p:sldIdLst>
   <p:sldSz cx="9144000" cy="5143500" type="screen16x9"/>
@@ -6294,10 +6294,10 @@
       </p:sp>
       <p:pic>
         <p:nvPicPr>
-          <p:cNvPr id="3" name="Imagen 2">
+          <p:cNvPr id="4" name="Imagen 3">
             <a:extLst>
               <a:ext uri="{FF2B5EF4-FFF2-40B4-BE49-F238E27FC236}">
-                <a16:creationId xmlns:a16="http://schemas.microsoft.com/office/drawing/2014/main" id="{C33F51A5-DDE1-50DF-8428-6CC2995A3892}"/>
+                <a16:creationId xmlns:a16="http://schemas.microsoft.com/office/drawing/2014/main" id="{7095C627-C188-9541-3CA9-CB99DACF4112}"/>
               </a:ext>
             </a:extLst>
           </p:cNvPr>
@@ -6314,8 +6314,8 @@
         </p:blipFill>
         <p:spPr>
           <a:xfrm>
-            <a:off x="0" y="943956"/>
-            <a:ext cx="9144000" cy="3255588"/>
+            <a:off x="0" y="923082"/>
+            <a:ext cx="9144000" cy="3297335"/>
           </a:xfrm>
           <a:prstGeom prst="rect">
             <a:avLst/>
@@ -6398,10 +6398,10 @@
       </p:sp>
       <p:pic>
         <p:nvPicPr>
-          <p:cNvPr id="4" name="Imagen 3">
+          <p:cNvPr id="3" name="Imagen 2">
             <a:extLst>
               <a:ext uri="{FF2B5EF4-FFF2-40B4-BE49-F238E27FC236}">
-                <a16:creationId xmlns:a16="http://schemas.microsoft.com/office/drawing/2014/main" id="{66BA0171-71BA-F3F5-3C7D-9DAC76487538}"/>
+                <a16:creationId xmlns:a16="http://schemas.microsoft.com/office/drawing/2014/main" id="{C2B07F8C-FDF8-2A0B-AAB4-DA59922AD2C6}"/>
               </a:ext>
             </a:extLst>
           </p:cNvPr>
@@ -6418,8 +6418,8 @@
         </p:blipFill>
         <p:spPr>
           <a:xfrm>
-            <a:off x="39088" y="369332"/>
-            <a:ext cx="8992800" cy="4684714"/>
+            <a:off x="0" y="490021"/>
+            <a:ext cx="9144000" cy="4306333"/>
           </a:xfrm>
           <a:prstGeom prst="rect">
             <a:avLst/>
@@ -6496,10 +6496,10 @@
       </p:sp>
       <p:pic>
         <p:nvPicPr>
-          <p:cNvPr id="4" name="Imagen 3">
+          <p:cNvPr id="5" name="Imagen 4">
             <a:extLst>
               <a:ext uri="{FF2B5EF4-FFF2-40B4-BE49-F238E27FC236}">
-                <a16:creationId xmlns:a16="http://schemas.microsoft.com/office/drawing/2014/main" id="{DA05E811-CCE8-7076-8FB3-468242175B2C}"/>
+                <a16:creationId xmlns:a16="http://schemas.microsoft.com/office/drawing/2014/main" id="{37944D54-F589-9B84-6DDF-3D6DE47FF307}"/>
               </a:ext>
             </a:extLst>
           </p:cNvPr>
@@ -6516,8 +6516,8 @@
         </p:blipFill>
         <p:spPr>
           <a:xfrm>
-            <a:off x="0" y="854375"/>
-            <a:ext cx="9144000" cy="3434750"/>
+            <a:off x="0" y="1048304"/>
+            <a:ext cx="9144000" cy="3189768"/>
           </a:xfrm>
           <a:prstGeom prst="rect">
             <a:avLst/>
@@ -6594,10 +6594,10 @@
       </p:sp>
       <p:pic>
         <p:nvPicPr>
-          <p:cNvPr id="4" name="Imagen 3">
+          <p:cNvPr id="3" name="Imagen 2">
             <a:extLst>
               <a:ext uri="{FF2B5EF4-FFF2-40B4-BE49-F238E27FC236}">
-                <a16:creationId xmlns:a16="http://schemas.microsoft.com/office/drawing/2014/main" id="{57D6A1AC-C962-D859-2201-FBFEE06489EC}"/>
+                <a16:creationId xmlns:a16="http://schemas.microsoft.com/office/drawing/2014/main" id="{BA4FB61B-2833-D781-8A7C-97C86660960B}"/>
               </a:ext>
             </a:extLst>
           </p:cNvPr>
@@ -6614,8 +6614,8 @@
         </p:blipFill>
         <p:spPr>
           <a:xfrm>
-            <a:off x="0" y="1259985"/>
-            <a:ext cx="9144000" cy="2623530"/>
+            <a:off x="0" y="1355765"/>
+            <a:ext cx="9144000" cy="2431969"/>
           </a:xfrm>
           <a:prstGeom prst="rect">
             <a:avLst/>
@@ -6636,6 +6636,110 @@
 </file>
 
 <file path=ppt/slides/slide14.xml><?xml version="1.0" encoding="utf-8"?>
+<p:sld xmlns:a="http://schemas.openxmlformats.org/drawingml/2006/main" xmlns:r="http://schemas.openxmlformats.org/officeDocument/2006/relationships" xmlns:p="http://schemas.openxmlformats.org/presentationml/2006/main">
+  <p:cSld>
+    <p:spTree>
+      <p:nvGrpSpPr>
+        <p:cNvPr id="1" name="">
+          <a:extLst>
+            <a:ext uri="{FF2B5EF4-FFF2-40B4-BE49-F238E27FC236}">
+              <a16:creationId xmlns:a16="http://schemas.microsoft.com/office/drawing/2014/main" id="{25AC7708-DCCA-DE7C-B9EB-ED6BAEAADFC7}"/>
+            </a:ext>
+          </a:extLst>
+        </p:cNvPr>
+        <p:cNvGrpSpPr/>
+        <p:nvPr/>
+      </p:nvGrpSpPr>
+      <p:grpSpPr>
+        <a:xfrm>
+          <a:off x="0" y="0"/>
+          <a:ext cx="0" cy="0"/>
+          <a:chOff x="0" y="0"/>
+          <a:chExt cx="0" cy="0"/>
+        </a:xfrm>
+      </p:grpSpPr>
+      <p:sp>
+        <p:nvSpPr>
+          <p:cNvPr id="6" name="CuadroTexto 5">
+            <a:extLst>
+              <a:ext uri="{FF2B5EF4-FFF2-40B4-BE49-F238E27FC236}">
+                <a16:creationId xmlns:a16="http://schemas.microsoft.com/office/drawing/2014/main" id="{2C3C8974-6B06-B7AB-35FE-D8F2FAD85529}"/>
+              </a:ext>
+            </a:extLst>
+          </p:cNvPr>
+          <p:cNvSpPr txBox="1"/>
+          <p:nvPr/>
+        </p:nvSpPr>
+        <p:spPr>
+          <a:xfrm>
+            <a:off x="1926166" y="88135"/>
+            <a:ext cx="5291667" cy="307777"/>
+          </a:xfrm>
+          <a:prstGeom prst="rect">
+            <a:avLst/>
+          </a:prstGeom>
+          <a:noFill/>
+        </p:spPr>
+        <p:txBody>
+          <a:bodyPr wrap="square" rtlCol="0">
+            <a:spAutoFit/>
+          </a:bodyPr>
+          <a:lstStyle/>
+          <a:p>
+            <a:pPr algn="ctr"/>
+            <a:r>
+              <a:rPr lang="es-MX" b="1" dirty="0">
+                <a:latin typeface="Montserrat" pitchFamily="2" charset="0"/>
+              </a:rPr>
+              <a:t>Temas de gobierno por radiodifusora</a:t>
+            </a:r>
+          </a:p>
+        </p:txBody>
+      </p:sp>
+      <p:pic>
+        <p:nvPicPr>
+          <p:cNvPr id="4" name="Imagen 3">
+            <a:extLst>
+              <a:ext uri="{FF2B5EF4-FFF2-40B4-BE49-F238E27FC236}">
+                <a16:creationId xmlns:a16="http://schemas.microsoft.com/office/drawing/2014/main" id="{278F5DAC-5985-EB5E-1A85-176F40E0E9FE}"/>
+              </a:ext>
+            </a:extLst>
+          </p:cNvPr>
+          <p:cNvPicPr>
+            <a:picLocks noChangeAspect="1"/>
+          </p:cNvPicPr>
+          <p:nvPr/>
+        </p:nvPicPr>
+        <p:blipFill>
+          <a:blip r:embed="rId2"/>
+          <a:stretch>
+            <a:fillRect/>
+          </a:stretch>
+        </p:blipFill>
+        <p:spPr>
+          <a:xfrm>
+            <a:off x="0" y="395912"/>
+            <a:ext cx="9144000" cy="4419769"/>
+          </a:xfrm>
+          <a:prstGeom prst="rect">
+            <a:avLst/>
+          </a:prstGeom>
+        </p:spPr>
+      </p:pic>
+    </p:spTree>
+    <p:extLst>
+      <p:ext uri="{BB962C8B-B14F-4D97-AF65-F5344CB8AC3E}">
+        <p14:creationId xmlns:p14="http://schemas.microsoft.com/office/powerpoint/2010/main" val="4108755736"/>
+      </p:ext>
+    </p:extLst>
+  </p:cSld>
+  <p:clrMapOvr>
+    <a:masterClrMapping/>
+  </p:clrMapOvr>
+</p:sld>
+</file>
+
+<file path=ppt/slides/slide15.xml><?xml version="1.0" encoding="utf-8"?>
 <p:sld xmlns:a="http://schemas.openxmlformats.org/drawingml/2006/main" xmlns:r="http://schemas.openxmlformats.org/officeDocument/2006/relationships" xmlns:p="http://schemas.openxmlformats.org/presentationml/2006/main">
   <p:cSld>
     <p:spTree>
@@ -6692,10 +6796,10 @@
       </p:sp>
       <p:pic>
         <p:nvPicPr>
-          <p:cNvPr id="5" name="Imagen 4">
+          <p:cNvPr id="3" name="Imagen 2">
             <a:extLst>
               <a:ext uri="{FF2B5EF4-FFF2-40B4-BE49-F238E27FC236}">
-                <a16:creationId xmlns:a16="http://schemas.microsoft.com/office/drawing/2014/main" id="{03B99167-0C91-5F35-95A4-1D103F6FE951}"/>
+                <a16:creationId xmlns:a16="http://schemas.microsoft.com/office/drawing/2014/main" id="{BA58F4C4-21BA-DF1B-0429-6D2666521540}"/>
               </a:ext>
             </a:extLst>
           </p:cNvPr>
@@ -6712,8 +6816,8 @@
         </p:blipFill>
         <p:spPr>
           <a:xfrm>
-            <a:off x="0" y="1186986"/>
-            <a:ext cx="9144000" cy="2769528"/>
+            <a:off x="0" y="729327"/>
+            <a:ext cx="9144000" cy="3827721"/>
           </a:xfrm>
           <a:prstGeom prst="rect">
             <a:avLst/>
@@ -6724,110 +6828,6 @@
     <p:extLst>
       <p:ext uri="{BB962C8B-B14F-4D97-AF65-F5344CB8AC3E}">
         <p14:creationId xmlns:p14="http://schemas.microsoft.com/office/powerpoint/2010/main" val="4087888137"/>
-      </p:ext>
-    </p:extLst>
-  </p:cSld>
-  <p:clrMapOvr>
-    <a:masterClrMapping/>
-  </p:clrMapOvr>
-</p:sld>
-</file>
-
-<file path=ppt/slides/slide15.xml><?xml version="1.0" encoding="utf-8"?>
-<p:sld xmlns:a="http://schemas.openxmlformats.org/drawingml/2006/main" xmlns:r="http://schemas.openxmlformats.org/officeDocument/2006/relationships" xmlns:p="http://schemas.openxmlformats.org/presentationml/2006/main">
-  <p:cSld>
-    <p:spTree>
-      <p:nvGrpSpPr>
-        <p:cNvPr id="1" name="">
-          <a:extLst>
-            <a:ext uri="{FF2B5EF4-FFF2-40B4-BE49-F238E27FC236}">
-              <a16:creationId xmlns:a16="http://schemas.microsoft.com/office/drawing/2014/main" id="{B3066DA7-1654-05B4-66BE-9EA722EFE367}"/>
-            </a:ext>
-          </a:extLst>
-        </p:cNvPr>
-        <p:cNvGrpSpPr/>
-        <p:nvPr/>
-      </p:nvGrpSpPr>
-      <p:grpSpPr>
-        <a:xfrm>
-          <a:off x="0" y="0"/>
-          <a:ext cx="0" cy="0"/>
-          <a:chOff x="0" y="0"/>
-          <a:chExt cx="0" cy="0"/>
-        </a:xfrm>
-      </p:grpSpPr>
-      <p:sp>
-        <p:nvSpPr>
-          <p:cNvPr id="4" name="CuadroTexto 3">
-            <a:extLst>
-              <a:ext uri="{FF2B5EF4-FFF2-40B4-BE49-F238E27FC236}">
-                <a16:creationId xmlns:a16="http://schemas.microsoft.com/office/drawing/2014/main" id="{C82DF43C-D1A9-76A9-3E15-6BB25CE18BC6}"/>
-              </a:ext>
-            </a:extLst>
-          </p:cNvPr>
-          <p:cNvSpPr txBox="1"/>
-          <p:nvPr/>
-        </p:nvSpPr>
-        <p:spPr>
-          <a:xfrm>
-            <a:off x="1926166" y="0"/>
-            <a:ext cx="5291667" cy="307777"/>
-          </a:xfrm>
-          <a:prstGeom prst="rect">
-            <a:avLst/>
-          </a:prstGeom>
-          <a:noFill/>
-        </p:spPr>
-        <p:txBody>
-          <a:bodyPr wrap="square" rtlCol="0">
-            <a:spAutoFit/>
-          </a:bodyPr>
-          <a:lstStyle/>
-          <a:p>
-            <a:pPr algn="ctr"/>
-            <a:r>
-              <a:rPr lang="es-MX" b="1" dirty="0">
-                <a:latin typeface="Montserrat" pitchFamily="2" charset="0"/>
-              </a:rPr>
-              <a:t>Información emitida por radioescuchas</a:t>
-            </a:r>
-          </a:p>
-        </p:txBody>
-      </p:sp>
-      <p:pic>
-        <p:nvPicPr>
-          <p:cNvPr id="3" name="Imagen 2">
-            <a:extLst>
-              <a:ext uri="{FF2B5EF4-FFF2-40B4-BE49-F238E27FC236}">
-                <a16:creationId xmlns:a16="http://schemas.microsoft.com/office/drawing/2014/main" id="{9FFA6354-81B9-3AF6-8B42-14034B29D1F9}"/>
-              </a:ext>
-            </a:extLst>
-          </p:cNvPr>
-          <p:cNvPicPr>
-            <a:picLocks noChangeAspect="1"/>
-          </p:cNvPicPr>
-          <p:nvPr/>
-        </p:nvPicPr>
-        <p:blipFill>
-          <a:blip r:embed="rId2"/>
-          <a:stretch>
-            <a:fillRect/>
-          </a:stretch>
-        </p:blipFill>
-        <p:spPr>
-          <a:xfrm>
-            <a:off x="0" y="725651"/>
-            <a:ext cx="9144000" cy="3835074"/>
-          </a:xfrm>
-          <a:prstGeom prst="rect">
-            <a:avLst/>
-          </a:prstGeom>
-        </p:spPr>
-      </p:pic>
-    </p:spTree>
-    <p:extLst>
-      <p:ext uri="{BB962C8B-B14F-4D97-AF65-F5344CB8AC3E}">
-        <p14:creationId xmlns:p14="http://schemas.microsoft.com/office/powerpoint/2010/main" val="1510467552"/>
       </p:ext>
     </p:extLst>
   </p:cSld>
@@ -6964,10 +6964,10 @@
       </p:sp>
       <p:pic>
         <p:nvPicPr>
-          <p:cNvPr id="4" name="Imagen 3">
+          <p:cNvPr id="3" name="Imagen 2">
             <a:extLst>
               <a:ext uri="{FF2B5EF4-FFF2-40B4-BE49-F238E27FC236}">
-                <a16:creationId xmlns:a16="http://schemas.microsoft.com/office/drawing/2014/main" id="{19AA48BD-5D26-3DD7-7552-9C7B3A906269}"/>
+                <a16:creationId xmlns:a16="http://schemas.microsoft.com/office/drawing/2014/main" id="{01DFBA31-13C2-B8E2-CF42-6E578CC19CA0}"/>
               </a:ext>
             </a:extLst>
           </p:cNvPr>
@@ -6984,8 +6984,8 @@
         </p:blipFill>
         <p:spPr>
           <a:xfrm>
-            <a:off x="256786" y="471694"/>
-            <a:ext cx="8557404" cy="4671806"/>
+            <a:off x="0" y="735926"/>
+            <a:ext cx="9144000" cy="3814524"/>
           </a:xfrm>
           <a:prstGeom prst="rect">
             <a:avLst/>
@@ -7072,10 +7072,10 @@
       </p:sp>
       <p:pic>
         <p:nvPicPr>
-          <p:cNvPr id="3" name="Imagen 2">
+          <p:cNvPr id="4" name="Imagen 3">
             <a:extLst>
               <a:ext uri="{FF2B5EF4-FFF2-40B4-BE49-F238E27FC236}">
-                <a16:creationId xmlns:a16="http://schemas.microsoft.com/office/drawing/2014/main" id="{FB5CB570-009B-4623-2C03-F09DDE517590}"/>
+                <a16:creationId xmlns:a16="http://schemas.microsoft.com/office/drawing/2014/main" id="{840E6232-815A-3C73-A847-BE7760EDE349}"/>
               </a:ext>
             </a:extLst>
           </p:cNvPr>
@@ -7092,8 +7092,8 @@
         </p:blipFill>
         <p:spPr>
           <a:xfrm>
-            <a:off x="0" y="748830"/>
-            <a:ext cx="9144000" cy="3645839"/>
+            <a:off x="0" y="1273077"/>
+            <a:ext cx="9144000" cy="2740222"/>
           </a:xfrm>
           <a:prstGeom prst="rect">
             <a:avLst/>
@@ -7186,10 +7186,10 @@
       </p:sp>
       <p:pic>
         <p:nvPicPr>
-          <p:cNvPr id="2" name="Imagen 1">
+          <p:cNvPr id="4" name="Imagen 3">
             <a:extLst>
               <a:ext uri="{FF2B5EF4-FFF2-40B4-BE49-F238E27FC236}">
-                <a16:creationId xmlns:a16="http://schemas.microsoft.com/office/drawing/2014/main" id="{B53ABE72-4219-B8D4-6D66-F9013F7460A5}"/>
+                <a16:creationId xmlns:a16="http://schemas.microsoft.com/office/drawing/2014/main" id="{C10AE3D9-55F5-8D29-C2D8-468BA00DC647}"/>
               </a:ext>
             </a:extLst>
           </p:cNvPr>
@@ -7206,8 +7206,8 @@
         </p:blipFill>
         <p:spPr>
           <a:xfrm>
-            <a:off x="1495640" y="499288"/>
-            <a:ext cx="6079695" cy="4644212"/>
+            <a:off x="1149897" y="585900"/>
+            <a:ext cx="6844205" cy="3904200"/>
           </a:xfrm>
           <a:prstGeom prst="rect">
             <a:avLst/>
@@ -7290,10 +7290,10 @@
       </p:sp>
       <p:pic>
         <p:nvPicPr>
-          <p:cNvPr id="6" name="Imagen 5">
+          <p:cNvPr id="3" name="Imagen 2">
             <a:extLst>
               <a:ext uri="{FF2B5EF4-FFF2-40B4-BE49-F238E27FC236}">
-                <a16:creationId xmlns:a16="http://schemas.microsoft.com/office/drawing/2014/main" id="{3F4D921D-78D7-FF53-9B9F-1084C2B9FECB}"/>
+                <a16:creationId xmlns:a16="http://schemas.microsoft.com/office/drawing/2014/main" id="{B7E757D4-DCEA-B91A-2611-993F6A8D86AC}"/>
               </a:ext>
             </a:extLst>
           </p:cNvPr>
@@ -7310,8 +7310,38 @@
         </p:blipFill>
         <p:spPr>
           <a:xfrm>
-            <a:off x="0" y="783391"/>
-            <a:ext cx="9144000" cy="3576717"/>
+            <a:off x="779248" y="431996"/>
+            <a:ext cx="7512477" cy="2612642"/>
+          </a:xfrm>
+          <a:prstGeom prst="rect">
+            <a:avLst/>
+          </a:prstGeom>
+        </p:spPr>
+      </p:pic>
+      <p:pic>
+        <p:nvPicPr>
+          <p:cNvPr id="5" name="Imagen 4">
+            <a:extLst>
+              <a:ext uri="{FF2B5EF4-FFF2-40B4-BE49-F238E27FC236}">
+                <a16:creationId xmlns:a16="http://schemas.microsoft.com/office/drawing/2014/main" id="{6033E0C9-EE9D-BB35-77A4-1D0FB4E28B23}"/>
+              </a:ext>
+            </a:extLst>
+          </p:cNvPr>
+          <p:cNvPicPr>
+            <a:picLocks noChangeAspect="1"/>
+          </p:cNvPicPr>
+          <p:nvPr/>
+        </p:nvPicPr>
+        <p:blipFill>
+          <a:blip r:embed="rId3"/>
+          <a:stretch>
+            <a:fillRect/>
+          </a:stretch>
+        </p:blipFill>
+        <p:spPr>
+          <a:xfrm>
+            <a:off x="647152" y="3044638"/>
+            <a:ext cx="7849695" cy="1409897"/>
           </a:xfrm>
           <a:prstGeom prst="rect">
             <a:avLst/>
@@ -7404,10 +7434,10 @@
       </p:sp>
       <p:pic>
         <p:nvPicPr>
-          <p:cNvPr id="3" name="Imagen 2">
+          <p:cNvPr id="4" name="Imagen 3">
             <a:extLst>
               <a:ext uri="{FF2B5EF4-FFF2-40B4-BE49-F238E27FC236}">
-                <a16:creationId xmlns:a16="http://schemas.microsoft.com/office/drawing/2014/main" id="{A3D8C2FC-4298-BB50-3EA5-9142D86A459E}"/>
+                <a16:creationId xmlns:a16="http://schemas.microsoft.com/office/drawing/2014/main" id="{5CC108D5-6E34-D6F8-5F58-631090843415}"/>
               </a:ext>
             </a:extLst>
           </p:cNvPr>
@@ -7424,8 +7454,8 @@
         </p:blipFill>
         <p:spPr>
           <a:xfrm>
-            <a:off x="297611" y="483401"/>
-            <a:ext cx="8548777" cy="4660099"/>
+            <a:off x="0" y="669009"/>
+            <a:ext cx="9144000" cy="3805481"/>
           </a:xfrm>
           <a:prstGeom prst="rect">
             <a:avLst/>
@@ -7518,10 +7548,10 @@
       </p:sp>
       <p:pic>
         <p:nvPicPr>
-          <p:cNvPr id="2" name="Imagen 1">
+          <p:cNvPr id="3" name="Imagen 2">
             <a:extLst>
               <a:ext uri="{FF2B5EF4-FFF2-40B4-BE49-F238E27FC236}">
-                <a16:creationId xmlns:a16="http://schemas.microsoft.com/office/drawing/2014/main" id="{F1D56697-D635-F922-128C-2FD73D6636E6}"/>
+                <a16:creationId xmlns:a16="http://schemas.microsoft.com/office/drawing/2014/main" id="{C6CD5B48-7C3D-E888-2881-999414D61519}"/>
               </a:ext>
             </a:extLst>
           </p:cNvPr>
@@ -7538,8 +7568,8 @@
         </p:blipFill>
         <p:spPr>
           <a:xfrm>
-            <a:off x="1" y="692540"/>
-            <a:ext cx="4572000" cy="3901296"/>
+            <a:off x="0" y="853144"/>
+            <a:ext cx="4535488" cy="3580088"/>
           </a:xfrm>
           <a:prstGeom prst="rect">
             <a:avLst/>
@@ -7548,10 +7578,10 @@
       </p:pic>
       <p:pic>
         <p:nvPicPr>
-          <p:cNvPr id="4" name="Imagen 3">
+          <p:cNvPr id="5" name="Imagen 4">
             <a:extLst>
               <a:ext uri="{FF2B5EF4-FFF2-40B4-BE49-F238E27FC236}">
-                <a16:creationId xmlns:a16="http://schemas.microsoft.com/office/drawing/2014/main" id="{2CA2116F-9A13-E27C-42D8-A27DC5CBD3C1}"/>
+                <a16:creationId xmlns:a16="http://schemas.microsoft.com/office/drawing/2014/main" id="{0FEB071F-C959-1B1A-5235-AB2E6F580E1F}"/>
               </a:ext>
             </a:extLst>
           </p:cNvPr>
@@ -7568,8 +7598,8 @@
         </p:blipFill>
         <p:spPr>
           <a:xfrm>
-            <a:off x="4572000" y="776376"/>
-            <a:ext cx="4572000" cy="3817459"/>
+            <a:off x="4535488" y="853144"/>
+            <a:ext cx="4608512" cy="3580088"/>
           </a:xfrm>
           <a:prstGeom prst="rect">
             <a:avLst/>
@@ -7646,10 +7676,10 @@
       </p:sp>
       <p:pic>
         <p:nvPicPr>
-          <p:cNvPr id="4" name="Imagen 3">
+          <p:cNvPr id="3" name="Imagen 2">
             <a:extLst>
               <a:ext uri="{FF2B5EF4-FFF2-40B4-BE49-F238E27FC236}">
-                <a16:creationId xmlns:a16="http://schemas.microsoft.com/office/drawing/2014/main" id="{52D642DF-E5BD-2BAF-E5C1-13813D8E3B6A}"/>
+                <a16:creationId xmlns:a16="http://schemas.microsoft.com/office/drawing/2014/main" id="{BA053D0C-F22E-5FB5-96E0-3AAEDADF806C}"/>
               </a:ext>
             </a:extLst>
           </p:cNvPr>
@@ -7666,8 +7696,8 @@
         </p:blipFill>
         <p:spPr>
           <a:xfrm>
-            <a:off x="0" y="1611466"/>
-            <a:ext cx="9144000" cy="1920568"/>
+            <a:off x="580468" y="1180906"/>
+            <a:ext cx="7983064" cy="2781688"/>
           </a:xfrm>
           <a:prstGeom prst="rect">
             <a:avLst/>
@@ -7750,10 +7780,10 @@
       </p:sp>
       <p:pic>
         <p:nvPicPr>
-          <p:cNvPr id="7" name="Imagen 6">
+          <p:cNvPr id="4" name="Imagen 3">
             <a:extLst>
               <a:ext uri="{FF2B5EF4-FFF2-40B4-BE49-F238E27FC236}">
-                <a16:creationId xmlns:a16="http://schemas.microsoft.com/office/drawing/2014/main" id="{34EC91A9-4CAD-E2D8-9B33-9A9337C5566A}"/>
+                <a16:creationId xmlns:a16="http://schemas.microsoft.com/office/drawing/2014/main" id="{C519BA72-2701-F890-7AA0-077A8280DCCB}"/>
               </a:ext>
             </a:extLst>
           </p:cNvPr>
@@ -7770,8 +7800,8 @@
         </p:blipFill>
         <p:spPr>
           <a:xfrm>
-            <a:off x="0" y="440453"/>
-            <a:ext cx="9144000" cy="4405470"/>
+            <a:off x="0" y="377088"/>
+            <a:ext cx="9144000" cy="4389323"/>
           </a:xfrm>
           <a:prstGeom prst="rect">
             <a:avLst/>
